--- a/images/star-battle/templates/22-cairo-star-battle.pptx
+++ b/images/star-battle/templates/22-cairo-star-battle.pptx
@@ -7,6 +7,7 @@
   <p:sldIdLst>
     <p:sldId id="256" r:id="rId2"/>
     <p:sldId id="257" r:id="rId3"/>
+    <p:sldId id="258" r:id="rId4"/>
   </p:sldIdLst>
   <p:sldSz cx="12192000" cy="6858000"/>
   <p:notesSz cx="6858000" cy="9144000"/>
@@ -273,7 +274,7 @@
           <a:p>
             <a:fld id="{D33D087D-B594-43AD-97F7-D3DB49A238A1}" type="datetimeFigureOut">
               <a:rPr lang="pt-PT" smtClean="0"/>
-              <a:t>12/12/2020</a:t>
+              <a:t>17/01/2021</a:t>
             </a:fld>
             <a:endParaRPr lang="pt-PT"/>
           </a:p>
@@ -473,7 +474,7 @@
           <a:p>
             <a:fld id="{D33D087D-B594-43AD-97F7-D3DB49A238A1}" type="datetimeFigureOut">
               <a:rPr lang="pt-PT" smtClean="0"/>
-              <a:t>12/12/2020</a:t>
+              <a:t>17/01/2021</a:t>
             </a:fld>
             <a:endParaRPr lang="pt-PT"/>
           </a:p>
@@ -683,7 +684,7 @@
           <a:p>
             <a:fld id="{D33D087D-B594-43AD-97F7-D3DB49A238A1}" type="datetimeFigureOut">
               <a:rPr lang="pt-PT" smtClean="0"/>
-              <a:t>12/12/2020</a:t>
+              <a:t>17/01/2021</a:t>
             </a:fld>
             <a:endParaRPr lang="pt-PT"/>
           </a:p>
@@ -883,7 +884,7 @@
           <a:p>
             <a:fld id="{D33D087D-B594-43AD-97F7-D3DB49A238A1}" type="datetimeFigureOut">
               <a:rPr lang="pt-PT" smtClean="0"/>
-              <a:t>12/12/2020</a:t>
+              <a:t>17/01/2021</a:t>
             </a:fld>
             <a:endParaRPr lang="pt-PT"/>
           </a:p>
@@ -1159,7 +1160,7 @@
           <a:p>
             <a:fld id="{D33D087D-B594-43AD-97F7-D3DB49A238A1}" type="datetimeFigureOut">
               <a:rPr lang="pt-PT" smtClean="0"/>
-              <a:t>12/12/2020</a:t>
+              <a:t>17/01/2021</a:t>
             </a:fld>
             <a:endParaRPr lang="pt-PT"/>
           </a:p>
@@ -1427,7 +1428,7 @@
           <a:p>
             <a:fld id="{D33D087D-B594-43AD-97F7-D3DB49A238A1}" type="datetimeFigureOut">
               <a:rPr lang="pt-PT" smtClean="0"/>
-              <a:t>12/12/2020</a:t>
+              <a:t>17/01/2021</a:t>
             </a:fld>
             <a:endParaRPr lang="pt-PT"/>
           </a:p>
@@ -1842,7 +1843,7 @@
           <a:p>
             <a:fld id="{D33D087D-B594-43AD-97F7-D3DB49A238A1}" type="datetimeFigureOut">
               <a:rPr lang="pt-PT" smtClean="0"/>
-              <a:t>12/12/2020</a:t>
+              <a:t>17/01/2021</a:t>
             </a:fld>
             <a:endParaRPr lang="pt-PT"/>
           </a:p>
@@ -1984,7 +1985,7 @@
           <a:p>
             <a:fld id="{D33D087D-B594-43AD-97F7-D3DB49A238A1}" type="datetimeFigureOut">
               <a:rPr lang="pt-PT" smtClean="0"/>
-              <a:t>12/12/2020</a:t>
+              <a:t>17/01/2021</a:t>
             </a:fld>
             <a:endParaRPr lang="pt-PT"/>
           </a:p>
@@ -2097,7 +2098,7 @@
           <a:p>
             <a:fld id="{D33D087D-B594-43AD-97F7-D3DB49A238A1}" type="datetimeFigureOut">
               <a:rPr lang="pt-PT" smtClean="0"/>
-              <a:t>12/12/2020</a:t>
+              <a:t>17/01/2021</a:t>
             </a:fld>
             <a:endParaRPr lang="pt-PT"/>
           </a:p>
@@ -2410,7 +2411,7 @@
           <a:p>
             <a:fld id="{D33D087D-B594-43AD-97F7-D3DB49A238A1}" type="datetimeFigureOut">
               <a:rPr lang="pt-PT" smtClean="0"/>
-              <a:t>12/12/2020</a:t>
+              <a:t>17/01/2021</a:t>
             </a:fld>
             <a:endParaRPr lang="pt-PT"/>
           </a:p>
@@ -2699,7 +2700,7 @@
           <a:p>
             <a:fld id="{D33D087D-B594-43AD-97F7-D3DB49A238A1}" type="datetimeFigureOut">
               <a:rPr lang="pt-PT" smtClean="0"/>
-              <a:t>12/12/2020</a:t>
+              <a:t>17/01/2021</a:t>
             </a:fld>
             <a:endParaRPr lang="pt-PT"/>
           </a:p>
@@ -2942,7 +2943,7 @@
           <a:p>
             <a:fld id="{D33D087D-B594-43AD-97F7-D3DB49A238A1}" type="datetimeFigureOut">
               <a:rPr lang="pt-PT" smtClean="0"/>
-              <a:t>12/12/2020</a:t>
+              <a:t>17/01/2021</a:t>
             </a:fld>
             <a:endParaRPr lang="pt-PT"/>
           </a:p>
@@ -34598,6 +34599,116 @@
 </p:sld>
 </file>
 
+<file path=ppt/slides/slide3.xml><?xml version="1.0" encoding="utf-8"?>
+<p:sld xmlns:a="http://schemas.openxmlformats.org/drawingml/2006/main" xmlns:r="http://schemas.openxmlformats.org/officeDocument/2006/relationships" xmlns:p="http://schemas.openxmlformats.org/presentationml/2006/main">
+  <p:cSld>
+    <p:spTree>
+      <p:nvGrpSpPr>
+        <p:cNvPr id="1" name=""/>
+        <p:cNvGrpSpPr/>
+        <p:nvPr/>
+      </p:nvGrpSpPr>
+      <p:grpSpPr>
+        <a:xfrm>
+          <a:off x="0" y="0"/>
+          <a:ext cx="0" cy="0"/>
+          <a:chOff x="0" y="0"/>
+          <a:chExt cx="0" cy="0"/>
+        </a:xfrm>
+      </p:grpSpPr>
+      <p:sp>
+        <p:nvSpPr>
+          <p:cNvPr id="2" name="Title 1">
+            <a:extLst>
+              <a:ext uri="{FF2B5EF4-FFF2-40B4-BE49-F238E27FC236}">
+                <a16:creationId xmlns:a16="http://schemas.microsoft.com/office/drawing/2014/main" id="{78FA792A-56E6-4B80-B623-9975EC3616C0}"/>
+              </a:ext>
+            </a:extLst>
+          </p:cNvPr>
+          <p:cNvSpPr>
+            <a:spLocks noGrp="1"/>
+          </p:cNvSpPr>
+          <p:nvPr>
+            <p:ph type="title"/>
+          </p:nvPr>
+        </p:nvSpPr>
+        <p:spPr/>
+        <p:txBody>
+          <a:bodyPr/>
+          <a:lstStyle/>
+          <a:p>
+            <a:endParaRPr lang="en-US"/>
+          </a:p>
+        </p:txBody>
+      </p:sp>
+      <p:sp>
+        <p:nvSpPr>
+          <p:cNvPr id="3" name="Content Placeholder 2">
+            <a:extLst>
+              <a:ext uri="{FF2B5EF4-FFF2-40B4-BE49-F238E27FC236}">
+                <a16:creationId xmlns:a16="http://schemas.microsoft.com/office/drawing/2014/main" id="{68E1205B-EF7A-4875-9421-15188EF7E701}"/>
+              </a:ext>
+            </a:extLst>
+          </p:cNvPr>
+          <p:cNvSpPr>
+            <a:spLocks noGrp="1"/>
+          </p:cNvSpPr>
+          <p:nvPr>
+            <p:ph idx="1"/>
+          </p:nvPr>
+        </p:nvSpPr>
+        <p:spPr/>
+        <p:txBody>
+          <a:bodyPr/>
+          <a:lstStyle/>
+          <a:p>
+            <a:endParaRPr lang="en-US"/>
+          </a:p>
+        </p:txBody>
+      </p:sp>
+      <p:pic>
+        <p:nvPicPr>
+          <p:cNvPr id="4" name="Picture 3">
+            <a:extLst>
+              <a:ext uri="{FF2B5EF4-FFF2-40B4-BE49-F238E27FC236}">
+                <a16:creationId xmlns:a16="http://schemas.microsoft.com/office/drawing/2014/main" id="{D21AC83D-B750-4C63-B254-43B65A2E1743}"/>
+              </a:ext>
+            </a:extLst>
+          </p:cNvPr>
+          <p:cNvPicPr>
+            <a:picLocks noChangeAspect="1"/>
+          </p:cNvPicPr>
+          <p:nvPr/>
+        </p:nvPicPr>
+        <p:blipFill>
+          <a:blip r:embed="rId2"/>
+          <a:stretch>
+            <a:fillRect/>
+          </a:stretch>
+        </p:blipFill>
+        <p:spPr>
+          <a:xfrm>
+            <a:off x="333220" y="199891"/>
+            <a:ext cx="6013759" cy="5213618"/>
+          </a:xfrm>
+          <a:prstGeom prst="rect">
+            <a:avLst/>
+          </a:prstGeom>
+        </p:spPr>
+      </p:pic>
+    </p:spTree>
+    <p:extLst>
+      <p:ext uri="{BB962C8B-B14F-4D97-AF65-F5344CB8AC3E}">
+        <p14:creationId xmlns:p14="http://schemas.microsoft.com/office/powerpoint/2010/main" val="174044552"/>
+      </p:ext>
+    </p:extLst>
+  </p:cSld>
+  <p:clrMapOvr>
+    <a:masterClrMapping/>
+  </p:clrMapOvr>
+</p:sld>
+</file>
+
 <file path=ppt/theme/theme1.xml><?xml version="1.0" encoding="utf-8"?>
 <a:theme xmlns:a="http://schemas.openxmlformats.org/drawingml/2006/main" name="Office Theme">
   <a:themeElements>

--- a/images/star-battle/templates/22-cairo-star-battle.pptx
+++ b/images/star-battle/templates/22-cairo-star-battle.pptx
@@ -5,9 +5,9 @@
     <p:sldMasterId id="2147483648" r:id="rId1"/>
   </p:sldMasterIdLst>
   <p:sldIdLst>
-    <p:sldId id="256" r:id="rId2"/>
-    <p:sldId id="257" r:id="rId3"/>
-    <p:sldId id="258" r:id="rId4"/>
+    <p:sldId id="258" r:id="rId2"/>
+    <p:sldId id="256" r:id="rId3"/>
+    <p:sldId id="257" r:id="rId4"/>
   </p:sldIdLst>
   <p:sldSz cx="12192000" cy="6858000"/>
   <p:notesSz cx="6858000" cy="9144000"/>
@@ -274,7 +274,7 @@
           <a:p>
             <a:fld id="{D33D087D-B594-43AD-97F7-D3DB49A238A1}" type="datetimeFigureOut">
               <a:rPr lang="pt-PT" smtClean="0"/>
-              <a:t>17/01/2021</a:t>
+              <a:t>25/02/2021</a:t>
             </a:fld>
             <a:endParaRPr lang="pt-PT"/>
           </a:p>
@@ -474,7 +474,7 @@
           <a:p>
             <a:fld id="{D33D087D-B594-43AD-97F7-D3DB49A238A1}" type="datetimeFigureOut">
               <a:rPr lang="pt-PT" smtClean="0"/>
-              <a:t>17/01/2021</a:t>
+              <a:t>25/02/2021</a:t>
             </a:fld>
             <a:endParaRPr lang="pt-PT"/>
           </a:p>
@@ -684,7 +684,7 @@
           <a:p>
             <a:fld id="{D33D087D-B594-43AD-97F7-D3DB49A238A1}" type="datetimeFigureOut">
               <a:rPr lang="pt-PT" smtClean="0"/>
-              <a:t>17/01/2021</a:t>
+              <a:t>25/02/2021</a:t>
             </a:fld>
             <a:endParaRPr lang="pt-PT"/>
           </a:p>
@@ -884,7 +884,7 @@
           <a:p>
             <a:fld id="{D33D087D-B594-43AD-97F7-D3DB49A238A1}" type="datetimeFigureOut">
               <a:rPr lang="pt-PT" smtClean="0"/>
-              <a:t>17/01/2021</a:t>
+              <a:t>25/02/2021</a:t>
             </a:fld>
             <a:endParaRPr lang="pt-PT"/>
           </a:p>
@@ -1160,7 +1160,7 @@
           <a:p>
             <a:fld id="{D33D087D-B594-43AD-97F7-D3DB49A238A1}" type="datetimeFigureOut">
               <a:rPr lang="pt-PT" smtClean="0"/>
-              <a:t>17/01/2021</a:t>
+              <a:t>25/02/2021</a:t>
             </a:fld>
             <a:endParaRPr lang="pt-PT"/>
           </a:p>
@@ -1428,7 +1428,7 @@
           <a:p>
             <a:fld id="{D33D087D-B594-43AD-97F7-D3DB49A238A1}" type="datetimeFigureOut">
               <a:rPr lang="pt-PT" smtClean="0"/>
-              <a:t>17/01/2021</a:t>
+              <a:t>25/02/2021</a:t>
             </a:fld>
             <a:endParaRPr lang="pt-PT"/>
           </a:p>
@@ -1843,7 +1843,7 @@
           <a:p>
             <a:fld id="{D33D087D-B594-43AD-97F7-D3DB49A238A1}" type="datetimeFigureOut">
               <a:rPr lang="pt-PT" smtClean="0"/>
-              <a:t>17/01/2021</a:t>
+              <a:t>25/02/2021</a:t>
             </a:fld>
             <a:endParaRPr lang="pt-PT"/>
           </a:p>
@@ -1985,7 +1985,7 @@
           <a:p>
             <a:fld id="{D33D087D-B594-43AD-97F7-D3DB49A238A1}" type="datetimeFigureOut">
               <a:rPr lang="pt-PT" smtClean="0"/>
-              <a:t>17/01/2021</a:t>
+              <a:t>25/02/2021</a:t>
             </a:fld>
             <a:endParaRPr lang="pt-PT"/>
           </a:p>
@@ -2098,7 +2098,7 @@
           <a:p>
             <a:fld id="{D33D087D-B594-43AD-97F7-D3DB49A238A1}" type="datetimeFigureOut">
               <a:rPr lang="pt-PT" smtClean="0"/>
-              <a:t>17/01/2021</a:t>
+              <a:t>25/02/2021</a:t>
             </a:fld>
             <a:endParaRPr lang="pt-PT"/>
           </a:p>
@@ -2411,7 +2411,7 @@
           <a:p>
             <a:fld id="{D33D087D-B594-43AD-97F7-D3DB49A238A1}" type="datetimeFigureOut">
               <a:rPr lang="pt-PT" smtClean="0"/>
-              <a:t>17/01/2021</a:t>
+              <a:t>25/02/2021</a:t>
             </a:fld>
             <a:endParaRPr lang="pt-PT"/>
           </a:p>
@@ -2700,7 +2700,7 @@
           <a:p>
             <a:fld id="{D33D087D-B594-43AD-97F7-D3DB49A238A1}" type="datetimeFigureOut">
               <a:rPr lang="pt-PT" smtClean="0"/>
-              <a:t>17/01/2021</a:t>
+              <a:t>25/02/2021</a:t>
             </a:fld>
             <a:endParaRPr lang="pt-PT"/>
           </a:p>
@@ -2943,7 +2943,7 @@
           <a:p>
             <a:fld id="{D33D087D-B594-43AD-97F7-D3DB49A238A1}" type="datetimeFigureOut">
               <a:rPr lang="pt-PT" smtClean="0"/>
-              <a:t>17/01/2021</a:t>
+              <a:t>25/02/2021</a:t>
             </a:fld>
             <a:endParaRPr lang="pt-PT"/>
           </a:p>
@@ -3346,6 +3346,1583 @@
 <file path=ppt/slides/slide1.xml><?xml version="1.0" encoding="utf-8"?>
 <p:sld xmlns:a="http://schemas.openxmlformats.org/drawingml/2006/main" xmlns:r="http://schemas.openxmlformats.org/officeDocument/2006/relationships" xmlns:p="http://schemas.openxmlformats.org/presentationml/2006/main">
   <p:cSld>
+    <p:spTree>
+      <p:nvGrpSpPr>
+        <p:cNvPr id="1" name=""/>
+        <p:cNvGrpSpPr/>
+        <p:nvPr/>
+      </p:nvGrpSpPr>
+      <p:grpSpPr>
+        <a:xfrm>
+          <a:off x="0" y="0"/>
+          <a:ext cx="0" cy="0"/>
+          <a:chOff x="0" y="0"/>
+          <a:chExt cx="0" cy="0"/>
+        </a:xfrm>
+      </p:grpSpPr>
+      <p:sp>
+        <p:nvSpPr>
+          <p:cNvPr id="2" name="Title 1">
+            <a:extLst>
+              <a:ext uri="{FF2B5EF4-FFF2-40B4-BE49-F238E27FC236}">
+                <a16:creationId xmlns:a16="http://schemas.microsoft.com/office/drawing/2014/main" id="{78FA792A-56E6-4B80-B623-9975EC3616C0}"/>
+              </a:ext>
+            </a:extLst>
+          </p:cNvPr>
+          <p:cNvSpPr>
+            <a:spLocks noGrp="1"/>
+          </p:cNvSpPr>
+          <p:nvPr>
+            <p:ph type="title"/>
+          </p:nvPr>
+        </p:nvSpPr>
+        <p:spPr/>
+        <p:txBody>
+          <a:bodyPr/>
+          <a:lstStyle/>
+          <a:p>
+            <a:endParaRPr lang="en-US" dirty="0"/>
+          </a:p>
+        </p:txBody>
+      </p:sp>
+      <p:sp>
+        <p:nvSpPr>
+          <p:cNvPr id="3" name="Content Placeholder 2">
+            <a:extLst>
+              <a:ext uri="{FF2B5EF4-FFF2-40B4-BE49-F238E27FC236}">
+                <a16:creationId xmlns:a16="http://schemas.microsoft.com/office/drawing/2014/main" id="{68E1205B-EF7A-4875-9421-15188EF7E701}"/>
+              </a:ext>
+            </a:extLst>
+          </p:cNvPr>
+          <p:cNvSpPr>
+            <a:spLocks noGrp="1"/>
+          </p:cNvSpPr>
+          <p:nvPr>
+            <p:ph idx="1"/>
+          </p:nvPr>
+        </p:nvSpPr>
+        <p:spPr/>
+        <p:txBody>
+          <a:bodyPr/>
+          <a:lstStyle/>
+          <a:p>
+            <a:endParaRPr lang="en-US" dirty="0"/>
+          </a:p>
+        </p:txBody>
+      </p:sp>
+      <p:pic>
+        <p:nvPicPr>
+          <p:cNvPr id="4" name="Picture 3">
+            <a:extLst>
+              <a:ext uri="{FF2B5EF4-FFF2-40B4-BE49-F238E27FC236}">
+                <a16:creationId xmlns:a16="http://schemas.microsoft.com/office/drawing/2014/main" id="{D21AC83D-B750-4C63-B254-43B65A2E1743}"/>
+              </a:ext>
+            </a:extLst>
+          </p:cNvPr>
+          <p:cNvPicPr>
+            <a:picLocks noChangeAspect="1"/>
+          </p:cNvPicPr>
+          <p:nvPr/>
+        </p:nvPicPr>
+        <p:blipFill>
+          <a:blip r:embed="rId2"/>
+          <a:stretch>
+            <a:fillRect/>
+          </a:stretch>
+        </p:blipFill>
+        <p:spPr>
+          <a:xfrm>
+            <a:off x="333220" y="199891"/>
+            <a:ext cx="6013759" cy="5213618"/>
+          </a:xfrm>
+          <a:prstGeom prst="rect">
+            <a:avLst/>
+          </a:prstGeom>
+        </p:spPr>
+      </p:pic>
+      <p:grpSp>
+        <p:nvGrpSpPr>
+          <p:cNvPr id="31" name="Group 30">
+            <a:extLst>
+              <a:ext uri="{FF2B5EF4-FFF2-40B4-BE49-F238E27FC236}">
+                <a16:creationId xmlns:a16="http://schemas.microsoft.com/office/drawing/2014/main" id="{4CADEFE2-FFC4-415B-AF6B-12CFD7E352F9}"/>
+              </a:ext>
+            </a:extLst>
+          </p:cNvPr>
+          <p:cNvGrpSpPr/>
+          <p:nvPr/>
+        </p:nvGrpSpPr>
+        <p:grpSpPr>
+          <a:xfrm>
+            <a:off x="1148998" y="824821"/>
+            <a:ext cx="4351722" cy="4302060"/>
+            <a:chOff x="1964777" y="662261"/>
+            <a:chExt cx="4351722" cy="4302060"/>
+          </a:xfrm>
+        </p:grpSpPr>
+        <p:grpSp>
+          <p:nvGrpSpPr>
+            <p:cNvPr id="19" name="Group 18">
+              <a:extLst>
+                <a:ext uri="{FF2B5EF4-FFF2-40B4-BE49-F238E27FC236}">
+                  <a16:creationId xmlns:a16="http://schemas.microsoft.com/office/drawing/2014/main" id="{E4ABABB3-0841-43D4-BF88-4F1B10602C34}"/>
+                </a:ext>
+              </a:extLst>
+            </p:cNvPr>
+            <p:cNvGrpSpPr/>
+            <p:nvPr/>
+          </p:nvGrpSpPr>
+          <p:grpSpPr>
+            <a:xfrm>
+              <a:off x="1964777" y="1007376"/>
+              <a:ext cx="2620570" cy="3956945"/>
+              <a:chOff x="1964777" y="1007376"/>
+              <a:chExt cx="2620570" cy="3956945"/>
+            </a:xfrm>
+          </p:grpSpPr>
+          <p:grpSp>
+            <p:nvGrpSpPr>
+              <p:cNvPr id="11" name="Group 10">
+                <a:extLst>
+                  <a:ext uri="{FF2B5EF4-FFF2-40B4-BE49-F238E27FC236}">
+                    <a16:creationId xmlns:a16="http://schemas.microsoft.com/office/drawing/2014/main" id="{DE274FCF-18E7-4CB6-8800-FDFF268CA8C3}"/>
+                  </a:ext>
+                </a:extLst>
+              </p:cNvPr>
+              <p:cNvGrpSpPr/>
+              <p:nvPr/>
+            </p:nvGrpSpPr>
+            <p:grpSpPr>
+              <a:xfrm>
+                <a:off x="1964777" y="1007376"/>
+                <a:ext cx="2173530" cy="2198861"/>
+                <a:chOff x="1964777" y="1007376"/>
+                <a:chExt cx="2173530" cy="2198861"/>
+              </a:xfrm>
+            </p:grpSpPr>
+            <p:sp>
+              <p:nvSpPr>
+                <p:cNvPr id="5" name="Rectangle 4">
+                  <a:extLst>
+                    <a:ext uri="{FF2B5EF4-FFF2-40B4-BE49-F238E27FC236}">
+                      <a16:creationId xmlns:a16="http://schemas.microsoft.com/office/drawing/2014/main" id="{C34C13DF-D986-4B38-8B7A-5092626DD8D8}"/>
+                    </a:ext>
+                  </a:extLst>
+                </p:cNvPr>
+                <p:cNvSpPr/>
+                <p:nvPr/>
+              </p:nvSpPr>
+              <p:spPr>
+                <a:xfrm rot="19853748">
+                  <a:off x="2858856" y="1007376"/>
+                  <a:ext cx="1063869" cy="1118817"/>
+                </a:xfrm>
+                <a:prstGeom prst="rect">
+                  <a:avLst/>
+                </a:prstGeom>
+                <a:noFill/>
+                <a:ln w="76200">
+                  <a:solidFill>
+                    <a:srgbClr val="FFFF00"/>
+                  </a:solidFill>
+                </a:ln>
+              </p:spPr>
+              <p:style>
+                <a:lnRef idx="2">
+                  <a:schemeClr val="accent1">
+                    <a:shade val="50000"/>
+                  </a:schemeClr>
+                </a:lnRef>
+                <a:fillRef idx="1">
+                  <a:schemeClr val="accent1"/>
+                </a:fillRef>
+                <a:effectRef idx="0">
+                  <a:schemeClr val="accent1"/>
+                </a:effectRef>
+                <a:fontRef idx="minor">
+                  <a:schemeClr val="lt1"/>
+                </a:fontRef>
+              </p:style>
+              <p:txBody>
+                <a:bodyPr rtlCol="0" anchor="ctr"/>
+                <a:lstStyle/>
+                <a:p>
+                  <a:pPr algn="ctr"/>
+                  <a:endParaRPr lang="en-US"/>
+                </a:p>
+              </p:txBody>
+            </p:sp>
+            <p:sp>
+              <p:nvSpPr>
+                <p:cNvPr id="7" name="Rectangle 6">
+                  <a:extLst>
+                    <a:ext uri="{FF2B5EF4-FFF2-40B4-BE49-F238E27FC236}">
+                      <a16:creationId xmlns:a16="http://schemas.microsoft.com/office/drawing/2014/main" id="{5B756079-D98F-41BC-BB52-CA15E38F936F}"/>
+                    </a:ext>
+                  </a:extLst>
+                </p:cNvPr>
+                <p:cNvSpPr/>
+                <p:nvPr/>
+              </p:nvSpPr>
+              <p:spPr>
+                <a:xfrm rot="19853748">
+                  <a:off x="1964777" y="1216007"/>
+                  <a:ext cx="1063869" cy="1118817"/>
+                </a:xfrm>
+                <a:prstGeom prst="rect">
+                  <a:avLst/>
+                </a:prstGeom>
+                <a:noFill/>
+                <a:ln w="76200">
+                  <a:solidFill>
+                    <a:srgbClr val="FFFF00"/>
+                  </a:solidFill>
+                </a:ln>
+              </p:spPr>
+              <p:style>
+                <a:lnRef idx="2">
+                  <a:schemeClr val="accent1">
+                    <a:shade val="50000"/>
+                  </a:schemeClr>
+                </a:lnRef>
+                <a:fillRef idx="1">
+                  <a:schemeClr val="accent1"/>
+                </a:fillRef>
+                <a:effectRef idx="0">
+                  <a:schemeClr val="accent1"/>
+                </a:effectRef>
+                <a:fontRef idx="minor">
+                  <a:schemeClr val="lt1"/>
+                </a:fontRef>
+              </p:style>
+              <p:txBody>
+                <a:bodyPr rtlCol="0" anchor="ctr"/>
+                <a:lstStyle/>
+                <a:p>
+                  <a:pPr algn="ctr"/>
+                  <a:endParaRPr lang="en-US"/>
+                </a:p>
+              </p:txBody>
+            </p:sp>
+            <p:sp>
+              <p:nvSpPr>
+                <p:cNvPr id="9" name="Rectangle 8">
+                  <a:extLst>
+                    <a:ext uri="{FF2B5EF4-FFF2-40B4-BE49-F238E27FC236}">
+                      <a16:creationId xmlns:a16="http://schemas.microsoft.com/office/drawing/2014/main" id="{919AD784-BDFE-4435-9C0E-9F995F8410DD}"/>
+                    </a:ext>
+                  </a:extLst>
+                </p:cNvPr>
+                <p:cNvSpPr/>
+                <p:nvPr/>
+              </p:nvSpPr>
+              <p:spPr>
+                <a:xfrm rot="19853748">
+                  <a:off x="3074438" y="1878789"/>
+                  <a:ext cx="1063869" cy="1118817"/>
+                </a:xfrm>
+                <a:prstGeom prst="rect">
+                  <a:avLst/>
+                </a:prstGeom>
+                <a:noFill/>
+                <a:ln w="76200">
+                  <a:solidFill>
+                    <a:srgbClr val="FFFF00"/>
+                  </a:solidFill>
+                </a:ln>
+              </p:spPr>
+              <p:style>
+                <a:lnRef idx="2">
+                  <a:schemeClr val="accent1">
+                    <a:shade val="50000"/>
+                  </a:schemeClr>
+                </a:lnRef>
+                <a:fillRef idx="1">
+                  <a:schemeClr val="accent1"/>
+                </a:fillRef>
+                <a:effectRef idx="0">
+                  <a:schemeClr val="accent1"/>
+                </a:effectRef>
+                <a:fontRef idx="minor">
+                  <a:schemeClr val="lt1"/>
+                </a:fontRef>
+              </p:style>
+              <p:txBody>
+                <a:bodyPr rtlCol="0" anchor="ctr"/>
+                <a:lstStyle/>
+                <a:p>
+                  <a:pPr algn="ctr"/>
+                  <a:endParaRPr lang="en-US"/>
+                </a:p>
+              </p:txBody>
+            </p:sp>
+            <p:sp>
+              <p:nvSpPr>
+                <p:cNvPr id="10" name="Rectangle 9">
+                  <a:extLst>
+                    <a:ext uri="{FF2B5EF4-FFF2-40B4-BE49-F238E27FC236}">
+                      <a16:creationId xmlns:a16="http://schemas.microsoft.com/office/drawing/2014/main" id="{D43A75EA-7F57-4130-9ABF-21840B232CBE}"/>
+                    </a:ext>
+                  </a:extLst>
+                </p:cNvPr>
+                <p:cNvSpPr/>
+                <p:nvPr/>
+              </p:nvSpPr>
+              <p:spPr>
+                <a:xfrm rot="19853748">
+                  <a:off x="2180359" y="2087420"/>
+                  <a:ext cx="1063869" cy="1118817"/>
+                </a:xfrm>
+                <a:prstGeom prst="rect">
+                  <a:avLst/>
+                </a:prstGeom>
+                <a:noFill/>
+                <a:ln w="76200">
+                  <a:solidFill>
+                    <a:srgbClr val="FFFF00"/>
+                  </a:solidFill>
+                </a:ln>
+              </p:spPr>
+              <p:style>
+                <a:lnRef idx="2">
+                  <a:schemeClr val="accent1">
+                    <a:shade val="50000"/>
+                  </a:schemeClr>
+                </a:lnRef>
+                <a:fillRef idx="1">
+                  <a:schemeClr val="accent1"/>
+                </a:fillRef>
+                <a:effectRef idx="0">
+                  <a:schemeClr val="accent1"/>
+                </a:effectRef>
+                <a:fontRef idx="minor">
+                  <a:schemeClr val="lt1"/>
+                </a:fontRef>
+              </p:style>
+              <p:txBody>
+                <a:bodyPr rtlCol="0" anchor="ctr"/>
+                <a:lstStyle/>
+                <a:p>
+                  <a:pPr algn="ctr"/>
+                  <a:endParaRPr lang="en-US"/>
+                </a:p>
+              </p:txBody>
+            </p:sp>
+          </p:grpSp>
+          <p:grpSp>
+            <p:nvGrpSpPr>
+              <p:cNvPr id="14" name="Group 13">
+                <a:extLst>
+                  <a:ext uri="{FF2B5EF4-FFF2-40B4-BE49-F238E27FC236}">
+                    <a16:creationId xmlns:a16="http://schemas.microsoft.com/office/drawing/2014/main" id="{FECBC450-9136-436E-8F68-E174FA3EFFA6}"/>
+                  </a:ext>
+                </a:extLst>
+              </p:cNvPr>
+              <p:cNvGrpSpPr/>
+              <p:nvPr/>
+            </p:nvGrpSpPr>
+            <p:grpSpPr>
+              <a:xfrm>
+                <a:off x="2411817" y="2765460"/>
+                <a:ext cx="2173530" cy="2198861"/>
+                <a:chOff x="1964777" y="1007376"/>
+                <a:chExt cx="2173530" cy="2198861"/>
+              </a:xfrm>
+            </p:grpSpPr>
+            <p:sp>
+              <p:nvSpPr>
+                <p:cNvPr id="15" name="Rectangle 14">
+                  <a:extLst>
+                    <a:ext uri="{FF2B5EF4-FFF2-40B4-BE49-F238E27FC236}">
+                      <a16:creationId xmlns:a16="http://schemas.microsoft.com/office/drawing/2014/main" id="{8B18E83D-1A37-40F7-B1E9-40DFF3E240B3}"/>
+                    </a:ext>
+                  </a:extLst>
+                </p:cNvPr>
+                <p:cNvSpPr/>
+                <p:nvPr/>
+              </p:nvSpPr>
+              <p:spPr>
+                <a:xfrm rot="19853748">
+                  <a:off x="2858856" y="1007376"/>
+                  <a:ext cx="1063869" cy="1118817"/>
+                </a:xfrm>
+                <a:prstGeom prst="rect">
+                  <a:avLst/>
+                </a:prstGeom>
+                <a:noFill/>
+                <a:ln w="76200">
+                  <a:solidFill>
+                    <a:srgbClr val="FFFF00"/>
+                  </a:solidFill>
+                </a:ln>
+              </p:spPr>
+              <p:style>
+                <a:lnRef idx="2">
+                  <a:schemeClr val="accent1">
+                    <a:shade val="50000"/>
+                  </a:schemeClr>
+                </a:lnRef>
+                <a:fillRef idx="1">
+                  <a:schemeClr val="accent1"/>
+                </a:fillRef>
+                <a:effectRef idx="0">
+                  <a:schemeClr val="accent1"/>
+                </a:effectRef>
+                <a:fontRef idx="minor">
+                  <a:schemeClr val="lt1"/>
+                </a:fontRef>
+              </p:style>
+              <p:txBody>
+                <a:bodyPr rtlCol="0" anchor="ctr"/>
+                <a:lstStyle/>
+                <a:p>
+                  <a:pPr algn="ctr"/>
+                  <a:endParaRPr lang="en-US"/>
+                </a:p>
+              </p:txBody>
+            </p:sp>
+            <p:sp>
+              <p:nvSpPr>
+                <p:cNvPr id="16" name="Rectangle 15">
+                  <a:extLst>
+                    <a:ext uri="{FF2B5EF4-FFF2-40B4-BE49-F238E27FC236}">
+                      <a16:creationId xmlns:a16="http://schemas.microsoft.com/office/drawing/2014/main" id="{B88F1D36-E09D-4B99-98EB-733ADB6C8776}"/>
+                    </a:ext>
+                  </a:extLst>
+                </p:cNvPr>
+                <p:cNvSpPr/>
+                <p:nvPr/>
+              </p:nvSpPr>
+              <p:spPr>
+                <a:xfrm rot="19853748">
+                  <a:off x="1964777" y="1216007"/>
+                  <a:ext cx="1063869" cy="1118817"/>
+                </a:xfrm>
+                <a:prstGeom prst="rect">
+                  <a:avLst/>
+                </a:prstGeom>
+                <a:noFill/>
+                <a:ln w="76200">
+                  <a:solidFill>
+                    <a:srgbClr val="FFFF00"/>
+                  </a:solidFill>
+                </a:ln>
+              </p:spPr>
+              <p:style>
+                <a:lnRef idx="2">
+                  <a:schemeClr val="accent1">
+                    <a:shade val="50000"/>
+                  </a:schemeClr>
+                </a:lnRef>
+                <a:fillRef idx="1">
+                  <a:schemeClr val="accent1"/>
+                </a:fillRef>
+                <a:effectRef idx="0">
+                  <a:schemeClr val="accent1"/>
+                </a:effectRef>
+                <a:fontRef idx="minor">
+                  <a:schemeClr val="lt1"/>
+                </a:fontRef>
+              </p:style>
+              <p:txBody>
+                <a:bodyPr rtlCol="0" anchor="ctr"/>
+                <a:lstStyle/>
+                <a:p>
+                  <a:pPr algn="ctr"/>
+                  <a:endParaRPr lang="en-US"/>
+                </a:p>
+              </p:txBody>
+            </p:sp>
+            <p:sp>
+              <p:nvSpPr>
+                <p:cNvPr id="17" name="Rectangle 16">
+                  <a:extLst>
+                    <a:ext uri="{FF2B5EF4-FFF2-40B4-BE49-F238E27FC236}">
+                      <a16:creationId xmlns:a16="http://schemas.microsoft.com/office/drawing/2014/main" id="{B0997D65-A64B-4C19-8840-F9C5409EFC88}"/>
+                    </a:ext>
+                  </a:extLst>
+                </p:cNvPr>
+                <p:cNvSpPr/>
+                <p:nvPr/>
+              </p:nvSpPr>
+              <p:spPr>
+                <a:xfrm rot="19853748">
+                  <a:off x="3074438" y="1878789"/>
+                  <a:ext cx="1063869" cy="1118817"/>
+                </a:xfrm>
+                <a:prstGeom prst="rect">
+                  <a:avLst/>
+                </a:prstGeom>
+                <a:noFill/>
+                <a:ln w="76200">
+                  <a:solidFill>
+                    <a:srgbClr val="FFFF00"/>
+                  </a:solidFill>
+                </a:ln>
+              </p:spPr>
+              <p:style>
+                <a:lnRef idx="2">
+                  <a:schemeClr val="accent1">
+                    <a:shade val="50000"/>
+                  </a:schemeClr>
+                </a:lnRef>
+                <a:fillRef idx="1">
+                  <a:schemeClr val="accent1"/>
+                </a:fillRef>
+                <a:effectRef idx="0">
+                  <a:schemeClr val="accent1"/>
+                </a:effectRef>
+                <a:fontRef idx="minor">
+                  <a:schemeClr val="lt1"/>
+                </a:fontRef>
+              </p:style>
+              <p:txBody>
+                <a:bodyPr rtlCol="0" anchor="ctr"/>
+                <a:lstStyle/>
+                <a:p>
+                  <a:pPr algn="ctr"/>
+                  <a:endParaRPr lang="en-US"/>
+                </a:p>
+              </p:txBody>
+            </p:sp>
+            <p:sp>
+              <p:nvSpPr>
+                <p:cNvPr id="18" name="Rectangle 17">
+                  <a:extLst>
+                    <a:ext uri="{FF2B5EF4-FFF2-40B4-BE49-F238E27FC236}">
+                      <a16:creationId xmlns:a16="http://schemas.microsoft.com/office/drawing/2014/main" id="{E03AC4CC-5F18-421B-9765-1D7A6D0AB3EB}"/>
+                    </a:ext>
+                  </a:extLst>
+                </p:cNvPr>
+                <p:cNvSpPr/>
+                <p:nvPr/>
+              </p:nvSpPr>
+              <p:spPr>
+                <a:xfrm rot="19853748">
+                  <a:off x="2180359" y="2087420"/>
+                  <a:ext cx="1063869" cy="1118817"/>
+                </a:xfrm>
+                <a:prstGeom prst="rect">
+                  <a:avLst/>
+                </a:prstGeom>
+                <a:noFill/>
+                <a:ln w="76200">
+                  <a:solidFill>
+                    <a:srgbClr val="FFFF00"/>
+                  </a:solidFill>
+                </a:ln>
+              </p:spPr>
+              <p:style>
+                <a:lnRef idx="2">
+                  <a:schemeClr val="accent1">
+                    <a:shade val="50000"/>
+                  </a:schemeClr>
+                </a:lnRef>
+                <a:fillRef idx="1">
+                  <a:schemeClr val="accent1"/>
+                </a:fillRef>
+                <a:effectRef idx="0">
+                  <a:schemeClr val="accent1"/>
+                </a:effectRef>
+                <a:fontRef idx="minor">
+                  <a:schemeClr val="lt1"/>
+                </a:fontRef>
+              </p:style>
+              <p:txBody>
+                <a:bodyPr rtlCol="0" anchor="ctr"/>
+                <a:lstStyle/>
+                <a:p>
+                  <a:pPr algn="ctr"/>
+                  <a:endParaRPr lang="en-US"/>
+                </a:p>
+              </p:txBody>
+            </p:sp>
+          </p:grpSp>
+        </p:grpSp>
+        <p:grpSp>
+          <p:nvGrpSpPr>
+            <p:cNvPr id="20" name="Group 19">
+              <a:extLst>
+                <a:ext uri="{FF2B5EF4-FFF2-40B4-BE49-F238E27FC236}">
+                  <a16:creationId xmlns:a16="http://schemas.microsoft.com/office/drawing/2014/main" id="{B4C8F1A0-4757-4502-B5F4-6182DFCA10B9}"/>
+                </a:ext>
+              </a:extLst>
+            </p:cNvPr>
+            <p:cNvGrpSpPr/>
+            <p:nvPr/>
+          </p:nvGrpSpPr>
+          <p:grpSpPr>
+            <a:xfrm>
+              <a:off x="3726409" y="662261"/>
+              <a:ext cx="2590090" cy="3956945"/>
+              <a:chOff x="1964777" y="1007376"/>
+              <a:chExt cx="2590090" cy="3956945"/>
+            </a:xfrm>
+          </p:grpSpPr>
+          <p:grpSp>
+            <p:nvGrpSpPr>
+              <p:cNvPr id="21" name="Group 20">
+                <a:extLst>
+                  <a:ext uri="{FF2B5EF4-FFF2-40B4-BE49-F238E27FC236}">
+                    <a16:creationId xmlns:a16="http://schemas.microsoft.com/office/drawing/2014/main" id="{7E20E274-FB9E-49FE-BB41-90525A6C16C4}"/>
+                  </a:ext>
+                </a:extLst>
+              </p:cNvPr>
+              <p:cNvGrpSpPr/>
+              <p:nvPr/>
+            </p:nvGrpSpPr>
+            <p:grpSpPr>
+              <a:xfrm>
+                <a:off x="1964777" y="1007376"/>
+                <a:ext cx="2173530" cy="2198861"/>
+                <a:chOff x="1964777" y="1007376"/>
+                <a:chExt cx="2173530" cy="2198861"/>
+              </a:xfrm>
+            </p:grpSpPr>
+            <p:sp>
+              <p:nvSpPr>
+                <p:cNvPr id="27" name="Rectangle 26">
+                  <a:extLst>
+                    <a:ext uri="{FF2B5EF4-FFF2-40B4-BE49-F238E27FC236}">
+                      <a16:creationId xmlns:a16="http://schemas.microsoft.com/office/drawing/2014/main" id="{2A0E2222-D9D6-4B4E-B8C5-0C44248984F7}"/>
+                    </a:ext>
+                  </a:extLst>
+                </p:cNvPr>
+                <p:cNvSpPr/>
+                <p:nvPr/>
+              </p:nvSpPr>
+              <p:spPr>
+                <a:xfrm rot="19853748">
+                  <a:off x="2858856" y="1007376"/>
+                  <a:ext cx="1063869" cy="1118817"/>
+                </a:xfrm>
+                <a:prstGeom prst="rect">
+                  <a:avLst/>
+                </a:prstGeom>
+                <a:noFill/>
+                <a:ln w="76200">
+                  <a:solidFill>
+                    <a:srgbClr val="FFFF00"/>
+                  </a:solidFill>
+                </a:ln>
+              </p:spPr>
+              <p:style>
+                <a:lnRef idx="2">
+                  <a:schemeClr val="accent1">
+                    <a:shade val="50000"/>
+                  </a:schemeClr>
+                </a:lnRef>
+                <a:fillRef idx="1">
+                  <a:schemeClr val="accent1"/>
+                </a:fillRef>
+                <a:effectRef idx="0">
+                  <a:schemeClr val="accent1"/>
+                </a:effectRef>
+                <a:fontRef idx="minor">
+                  <a:schemeClr val="lt1"/>
+                </a:fontRef>
+              </p:style>
+              <p:txBody>
+                <a:bodyPr rtlCol="0" anchor="ctr"/>
+                <a:lstStyle/>
+                <a:p>
+                  <a:pPr algn="ctr"/>
+                  <a:endParaRPr lang="en-US"/>
+                </a:p>
+              </p:txBody>
+            </p:sp>
+            <p:sp>
+              <p:nvSpPr>
+                <p:cNvPr id="28" name="Rectangle 27">
+                  <a:extLst>
+                    <a:ext uri="{FF2B5EF4-FFF2-40B4-BE49-F238E27FC236}">
+                      <a16:creationId xmlns:a16="http://schemas.microsoft.com/office/drawing/2014/main" id="{C496B288-A5EF-443F-9E77-3571ED293741}"/>
+                    </a:ext>
+                  </a:extLst>
+                </p:cNvPr>
+                <p:cNvSpPr/>
+                <p:nvPr/>
+              </p:nvSpPr>
+              <p:spPr>
+                <a:xfrm rot="19853748">
+                  <a:off x="1964777" y="1216007"/>
+                  <a:ext cx="1063869" cy="1118817"/>
+                </a:xfrm>
+                <a:prstGeom prst="rect">
+                  <a:avLst/>
+                </a:prstGeom>
+                <a:noFill/>
+                <a:ln w="76200">
+                  <a:solidFill>
+                    <a:srgbClr val="FFFF00"/>
+                  </a:solidFill>
+                </a:ln>
+              </p:spPr>
+              <p:style>
+                <a:lnRef idx="2">
+                  <a:schemeClr val="accent1">
+                    <a:shade val="50000"/>
+                  </a:schemeClr>
+                </a:lnRef>
+                <a:fillRef idx="1">
+                  <a:schemeClr val="accent1"/>
+                </a:fillRef>
+                <a:effectRef idx="0">
+                  <a:schemeClr val="accent1"/>
+                </a:effectRef>
+                <a:fontRef idx="minor">
+                  <a:schemeClr val="lt1"/>
+                </a:fontRef>
+              </p:style>
+              <p:txBody>
+                <a:bodyPr rtlCol="0" anchor="ctr"/>
+                <a:lstStyle/>
+                <a:p>
+                  <a:pPr algn="ctr"/>
+                  <a:endParaRPr lang="en-US"/>
+                </a:p>
+              </p:txBody>
+            </p:sp>
+            <p:sp>
+              <p:nvSpPr>
+                <p:cNvPr id="29" name="Rectangle 28">
+                  <a:extLst>
+                    <a:ext uri="{FF2B5EF4-FFF2-40B4-BE49-F238E27FC236}">
+                      <a16:creationId xmlns:a16="http://schemas.microsoft.com/office/drawing/2014/main" id="{61AEA0D7-ADF4-4BE6-87BA-5CE4202CC290}"/>
+                    </a:ext>
+                  </a:extLst>
+                </p:cNvPr>
+                <p:cNvSpPr/>
+                <p:nvPr/>
+              </p:nvSpPr>
+              <p:spPr>
+                <a:xfrm rot="19853748">
+                  <a:off x="3074438" y="1878789"/>
+                  <a:ext cx="1063869" cy="1118817"/>
+                </a:xfrm>
+                <a:prstGeom prst="rect">
+                  <a:avLst/>
+                </a:prstGeom>
+                <a:noFill/>
+                <a:ln w="76200">
+                  <a:solidFill>
+                    <a:srgbClr val="FFFF00"/>
+                  </a:solidFill>
+                </a:ln>
+              </p:spPr>
+              <p:style>
+                <a:lnRef idx="2">
+                  <a:schemeClr val="accent1">
+                    <a:shade val="50000"/>
+                  </a:schemeClr>
+                </a:lnRef>
+                <a:fillRef idx="1">
+                  <a:schemeClr val="accent1"/>
+                </a:fillRef>
+                <a:effectRef idx="0">
+                  <a:schemeClr val="accent1"/>
+                </a:effectRef>
+                <a:fontRef idx="minor">
+                  <a:schemeClr val="lt1"/>
+                </a:fontRef>
+              </p:style>
+              <p:txBody>
+                <a:bodyPr rtlCol="0" anchor="ctr"/>
+                <a:lstStyle/>
+                <a:p>
+                  <a:pPr algn="ctr"/>
+                  <a:endParaRPr lang="en-US"/>
+                </a:p>
+              </p:txBody>
+            </p:sp>
+            <p:sp>
+              <p:nvSpPr>
+                <p:cNvPr id="30" name="Rectangle 29">
+                  <a:extLst>
+                    <a:ext uri="{FF2B5EF4-FFF2-40B4-BE49-F238E27FC236}">
+                      <a16:creationId xmlns:a16="http://schemas.microsoft.com/office/drawing/2014/main" id="{6914A585-5F3F-4877-8B8D-B0646AF51AB4}"/>
+                    </a:ext>
+                  </a:extLst>
+                </p:cNvPr>
+                <p:cNvSpPr/>
+                <p:nvPr/>
+              </p:nvSpPr>
+              <p:spPr>
+                <a:xfrm rot="19853748">
+                  <a:off x="2180359" y="2087420"/>
+                  <a:ext cx="1063869" cy="1118817"/>
+                </a:xfrm>
+                <a:prstGeom prst="rect">
+                  <a:avLst/>
+                </a:prstGeom>
+                <a:noFill/>
+                <a:ln w="76200">
+                  <a:solidFill>
+                    <a:srgbClr val="FFFF00"/>
+                  </a:solidFill>
+                </a:ln>
+              </p:spPr>
+              <p:style>
+                <a:lnRef idx="2">
+                  <a:schemeClr val="accent1">
+                    <a:shade val="50000"/>
+                  </a:schemeClr>
+                </a:lnRef>
+                <a:fillRef idx="1">
+                  <a:schemeClr val="accent1"/>
+                </a:fillRef>
+                <a:effectRef idx="0">
+                  <a:schemeClr val="accent1"/>
+                </a:effectRef>
+                <a:fontRef idx="minor">
+                  <a:schemeClr val="lt1"/>
+                </a:fontRef>
+              </p:style>
+              <p:txBody>
+                <a:bodyPr rtlCol="0" anchor="ctr"/>
+                <a:lstStyle/>
+                <a:p>
+                  <a:pPr algn="ctr"/>
+                  <a:endParaRPr lang="en-US"/>
+                </a:p>
+              </p:txBody>
+            </p:sp>
+          </p:grpSp>
+          <p:grpSp>
+            <p:nvGrpSpPr>
+              <p:cNvPr id="22" name="Group 21">
+                <a:extLst>
+                  <a:ext uri="{FF2B5EF4-FFF2-40B4-BE49-F238E27FC236}">
+                    <a16:creationId xmlns:a16="http://schemas.microsoft.com/office/drawing/2014/main" id="{80CDB487-4289-4BD1-B854-CF131A2CC477}"/>
+                  </a:ext>
+                </a:extLst>
+              </p:cNvPr>
+              <p:cNvGrpSpPr/>
+              <p:nvPr/>
+            </p:nvGrpSpPr>
+            <p:grpSpPr>
+              <a:xfrm>
+                <a:off x="2411817" y="2765460"/>
+                <a:ext cx="2143050" cy="2198861"/>
+                <a:chOff x="1964777" y="1007376"/>
+                <a:chExt cx="2143050" cy="2198861"/>
+              </a:xfrm>
+            </p:grpSpPr>
+            <p:sp>
+              <p:nvSpPr>
+                <p:cNvPr id="23" name="Rectangle 22">
+                  <a:extLst>
+                    <a:ext uri="{FF2B5EF4-FFF2-40B4-BE49-F238E27FC236}">
+                      <a16:creationId xmlns:a16="http://schemas.microsoft.com/office/drawing/2014/main" id="{7A7A0845-633E-45DD-8177-23DBCBD6CF87}"/>
+                    </a:ext>
+                  </a:extLst>
+                </p:cNvPr>
+                <p:cNvSpPr/>
+                <p:nvPr/>
+              </p:nvSpPr>
+              <p:spPr>
+                <a:xfrm rot="19853748">
+                  <a:off x="2858856" y="1007376"/>
+                  <a:ext cx="1063869" cy="1118817"/>
+                </a:xfrm>
+                <a:prstGeom prst="rect">
+                  <a:avLst/>
+                </a:prstGeom>
+                <a:noFill/>
+                <a:ln w="76200">
+                  <a:solidFill>
+                    <a:srgbClr val="FFFF00"/>
+                  </a:solidFill>
+                </a:ln>
+              </p:spPr>
+              <p:style>
+                <a:lnRef idx="2">
+                  <a:schemeClr val="accent1">
+                    <a:shade val="50000"/>
+                  </a:schemeClr>
+                </a:lnRef>
+                <a:fillRef idx="1">
+                  <a:schemeClr val="accent1"/>
+                </a:fillRef>
+                <a:effectRef idx="0">
+                  <a:schemeClr val="accent1"/>
+                </a:effectRef>
+                <a:fontRef idx="minor">
+                  <a:schemeClr val="lt1"/>
+                </a:fontRef>
+              </p:style>
+              <p:txBody>
+                <a:bodyPr rtlCol="0" anchor="ctr"/>
+                <a:lstStyle/>
+                <a:p>
+                  <a:pPr algn="ctr"/>
+                  <a:endParaRPr lang="en-US"/>
+                </a:p>
+              </p:txBody>
+            </p:sp>
+            <p:sp>
+              <p:nvSpPr>
+                <p:cNvPr id="24" name="Rectangle 23">
+                  <a:extLst>
+                    <a:ext uri="{FF2B5EF4-FFF2-40B4-BE49-F238E27FC236}">
+                      <a16:creationId xmlns:a16="http://schemas.microsoft.com/office/drawing/2014/main" id="{73DDAD56-2464-4C9F-A18C-0F0BF8314127}"/>
+                    </a:ext>
+                  </a:extLst>
+                </p:cNvPr>
+                <p:cNvSpPr/>
+                <p:nvPr/>
+              </p:nvSpPr>
+              <p:spPr>
+                <a:xfrm rot="19853748">
+                  <a:off x="1964777" y="1216007"/>
+                  <a:ext cx="1063869" cy="1118817"/>
+                </a:xfrm>
+                <a:prstGeom prst="rect">
+                  <a:avLst/>
+                </a:prstGeom>
+                <a:noFill/>
+                <a:ln w="76200">
+                  <a:solidFill>
+                    <a:srgbClr val="FFFF00"/>
+                  </a:solidFill>
+                </a:ln>
+              </p:spPr>
+              <p:style>
+                <a:lnRef idx="2">
+                  <a:schemeClr val="accent1">
+                    <a:shade val="50000"/>
+                  </a:schemeClr>
+                </a:lnRef>
+                <a:fillRef idx="1">
+                  <a:schemeClr val="accent1"/>
+                </a:fillRef>
+                <a:effectRef idx="0">
+                  <a:schemeClr val="accent1"/>
+                </a:effectRef>
+                <a:fontRef idx="minor">
+                  <a:schemeClr val="lt1"/>
+                </a:fontRef>
+              </p:style>
+              <p:txBody>
+                <a:bodyPr rtlCol="0" anchor="ctr"/>
+                <a:lstStyle/>
+                <a:p>
+                  <a:pPr algn="ctr"/>
+                  <a:endParaRPr lang="en-US"/>
+                </a:p>
+              </p:txBody>
+            </p:sp>
+            <p:sp>
+              <p:nvSpPr>
+                <p:cNvPr id="25" name="Rectangle 24">
+                  <a:extLst>
+                    <a:ext uri="{FF2B5EF4-FFF2-40B4-BE49-F238E27FC236}">
+                      <a16:creationId xmlns:a16="http://schemas.microsoft.com/office/drawing/2014/main" id="{701E81ED-6866-41A5-B2D3-688E725DBF29}"/>
+                    </a:ext>
+                  </a:extLst>
+                </p:cNvPr>
+                <p:cNvSpPr/>
+                <p:nvPr/>
+              </p:nvSpPr>
+              <p:spPr>
+                <a:xfrm rot="19853748">
+                  <a:off x="3043958" y="1838149"/>
+                  <a:ext cx="1063869" cy="1118817"/>
+                </a:xfrm>
+                <a:prstGeom prst="rect">
+                  <a:avLst/>
+                </a:prstGeom>
+                <a:noFill/>
+                <a:ln w="76200">
+                  <a:solidFill>
+                    <a:srgbClr val="FFFF00"/>
+                  </a:solidFill>
+                </a:ln>
+              </p:spPr>
+              <p:style>
+                <a:lnRef idx="2">
+                  <a:schemeClr val="accent1">
+                    <a:shade val="50000"/>
+                  </a:schemeClr>
+                </a:lnRef>
+                <a:fillRef idx="1">
+                  <a:schemeClr val="accent1"/>
+                </a:fillRef>
+                <a:effectRef idx="0">
+                  <a:schemeClr val="accent1"/>
+                </a:effectRef>
+                <a:fontRef idx="minor">
+                  <a:schemeClr val="lt1"/>
+                </a:fontRef>
+              </p:style>
+              <p:txBody>
+                <a:bodyPr rtlCol="0" anchor="ctr"/>
+                <a:lstStyle/>
+                <a:p>
+                  <a:pPr algn="ctr"/>
+                  <a:endParaRPr lang="en-US"/>
+                </a:p>
+              </p:txBody>
+            </p:sp>
+            <p:sp>
+              <p:nvSpPr>
+                <p:cNvPr id="26" name="Rectangle 25">
+                  <a:extLst>
+                    <a:ext uri="{FF2B5EF4-FFF2-40B4-BE49-F238E27FC236}">
+                      <a16:creationId xmlns:a16="http://schemas.microsoft.com/office/drawing/2014/main" id="{04D11858-F1F4-4B5E-9A50-1AFE519D004B}"/>
+                    </a:ext>
+                  </a:extLst>
+                </p:cNvPr>
+                <p:cNvSpPr/>
+                <p:nvPr/>
+              </p:nvSpPr>
+              <p:spPr>
+                <a:xfrm rot="19853748">
+                  <a:off x="2180359" y="2087420"/>
+                  <a:ext cx="1063869" cy="1118817"/>
+                </a:xfrm>
+                <a:prstGeom prst="rect">
+                  <a:avLst/>
+                </a:prstGeom>
+                <a:noFill/>
+                <a:ln w="76200">
+                  <a:solidFill>
+                    <a:srgbClr val="FFFF00"/>
+                  </a:solidFill>
+                </a:ln>
+              </p:spPr>
+              <p:style>
+                <a:lnRef idx="2">
+                  <a:schemeClr val="accent1">
+                    <a:shade val="50000"/>
+                  </a:schemeClr>
+                </a:lnRef>
+                <a:fillRef idx="1">
+                  <a:schemeClr val="accent1"/>
+                </a:fillRef>
+                <a:effectRef idx="0">
+                  <a:schemeClr val="accent1"/>
+                </a:effectRef>
+                <a:fontRef idx="minor">
+                  <a:schemeClr val="lt1"/>
+                </a:fontRef>
+              </p:style>
+              <p:txBody>
+                <a:bodyPr rtlCol="0" anchor="ctr"/>
+                <a:lstStyle/>
+                <a:p>
+                  <a:pPr algn="ctr"/>
+                  <a:endParaRPr lang="en-US"/>
+                </a:p>
+              </p:txBody>
+            </p:sp>
+          </p:grpSp>
+        </p:grpSp>
+      </p:grpSp>
+      <p:sp>
+        <p:nvSpPr>
+          <p:cNvPr id="33" name="Oval 32">
+            <a:extLst>
+              <a:ext uri="{FF2B5EF4-FFF2-40B4-BE49-F238E27FC236}">
+                <a16:creationId xmlns:a16="http://schemas.microsoft.com/office/drawing/2014/main" id="{C78CDE42-D860-4850-AEC0-301173BDB90B}"/>
+              </a:ext>
+            </a:extLst>
+          </p:cNvPr>
+          <p:cNvSpPr/>
+          <p:nvPr/>
+        </p:nvSpPr>
+        <p:spPr>
+          <a:xfrm>
+            <a:off x="7487920" y="1190466"/>
+            <a:ext cx="213360" cy="167289"/>
+          </a:xfrm>
+          <a:prstGeom prst="ellipse">
+            <a:avLst/>
+          </a:prstGeom>
+          <a:solidFill>
+            <a:schemeClr val="bg1">
+              <a:lumMod val="95000"/>
+            </a:schemeClr>
+          </a:solidFill>
+          <a:ln>
+            <a:solidFill>
+              <a:schemeClr val="bg1"/>
+            </a:solidFill>
+          </a:ln>
+        </p:spPr>
+        <p:style>
+          <a:lnRef idx="2">
+            <a:schemeClr val="accent1">
+              <a:shade val="50000"/>
+            </a:schemeClr>
+          </a:lnRef>
+          <a:fillRef idx="1">
+            <a:schemeClr val="accent1"/>
+          </a:fillRef>
+          <a:effectRef idx="0">
+            <a:schemeClr val="accent1"/>
+          </a:effectRef>
+          <a:fontRef idx="minor">
+            <a:schemeClr val="lt1"/>
+          </a:fontRef>
+        </p:style>
+        <p:txBody>
+          <a:bodyPr rtlCol="0" anchor="ctr"/>
+          <a:lstStyle/>
+          <a:p>
+            <a:pPr algn="ctr"/>
+            <a:endParaRPr lang="en-US"/>
+          </a:p>
+        </p:txBody>
+      </p:sp>
+      <p:sp>
+        <p:nvSpPr>
+          <p:cNvPr id="34" name="Oval 33">
+            <a:extLst>
+              <a:ext uri="{FF2B5EF4-FFF2-40B4-BE49-F238E27FC236}">
+                <a16:creationId xmlns:a16="http://schemas.microsoft.com/office/drawing/2014/main" id="{CF8F099D-6FED-40FA-A02D-A6ECE2551B4F}"/>
+              </a:ext>
+            </a:extLst>
+          </p:cNvPr>
+          <p:cNvSpPr/>
+          <p:nvPr/>
+        </p:nvSpPr>
+        <p:spPr>
+          <a:xfrm>
+            <a:off x="3990376" y="1017087"/>
+            <a:ext cx="213360" cy="167289"/>
+          </a:xfrm>
+          <a:prstGeom prst="ellipse">
+            <a:avLst/>
+          </a:prstGeom>
+          <a:solidFill>
+            <a:srgbClr val="00B050"/>
+          </a:solidFill>
+          <a:ln>
+            <a:solidFill>
+              <a:schemeClr val="bg1"/>
+            </a:solidFill>
+          </a:ln>
+        </p:spPr>
+        <p:style>
+          <a:lnRef idx="2">
+            <a:schemeClr val="accent1">
+              <a:shade val="50000"/>
+            </a:schemeClr>
+          </a:lnRef>
+          <a:fillRef idx="1">
+            <a:schemeClr val="accent1"/>
+          </a:fillRef>
+          <a:effectRef idx="0">
+            <a:schemeClr val="accent1"/>
+          </a:effectRef>
+          <a:fontRef idx="minor">
+            <a:schemeClr val="lt1"/>
+          </a:fontRef>
+        </p:style>
+        <p:txBody>
+          <a:bodyPr rtlCol="0" anchor="ctr"/>
+          <a:lstStyle/>
+          <a:p>
+            <a:pPr algn="ctr"/>
+            <a:endParaRPr lang="en-US"/>
+          </a:p>
+        </p:txBody>
+      </p:sp>
+      <p:sp>
+        <p:nvSpPr>
+          <p:cNvPr id="35" name="Oval 34">
+            <a:extLst>
+              <a:ext uri="{FF2B5EF4-FFF2-40B4-BE49-F238E27FC236}">
+                <a16:creationId xmlns:a16="http://schemas.microsoft.com/office/drawing/2014/main" id="{EE4EE2FA-9B8D-44C8-8320-BA18462DBCFB}"/>
+              </a:ext>
+            </a:extLst>
+          </p:cNvPr>
+          <p:cNvSpPr/>
+          <p:nvPr/>
+        </p:nvSpPr>
+        <p:spPr>
+          <a:xfrm>
+            <a:off x="3340099" y="2061880"/>
+            <a:ext cx="213360" cy="167289"/>
+          </a:xfrm>
+          <a:prstGeom prst="ellipse">
+            <a:avLst/>
+          </a:prstGeom>
+          <a:solidFill>
+            <a:srgbClr val="00B050"/>
+          </a:solidFill>
+          <a:ln>
+            <a:solidFill>
+              <a:schemeClr val="bg1"/>
+            </a:solidFill>
+          </a:ln>
+        </p:spPr>
+        <p:style>
+          <a:lnRef idx="2">
+            <a:schemeClr val="accent1">
+              <a:shade val="50000"/>
+            </a:schemeClr>
+          </a:lnRef>
+          <a:fillRef idx="1">
+            <a:schemeClr val="accent1"/>
+          </a:fillRef>
+          <a:effectRef idx="0">
+            <a:schemeClr val="accent1"/>
+          </a:effectRef>
+          <a:fontRef idx="minor">
+            <a:schemeClr val="lt1"/>
+          </a:fontRef>
+        </p:style>
+        <p:txBody>
+          <a:bodyPr rtlCol="0" anchor="ctr"/>
+          <a:lstStyle/>
+          <a:p>
+            <a:pPr algn="ctr"/>
+            <a:endParaRPr lang="en-US"/>
+          </a:p>
+        </p:txBody>
+      </p:sp>
+      <p:sp>
+        <p:nvSpPr>
+          <p:cNvPr id="39" name="Oval 38">
+            <a:extLst>
+              <a:ext uri="{FF2B5EF4-FFF2-40B4-BE49-F238E27FC236}">
+                <a16:creationId xmlns:a16="http://schemas.microsoft.com/office/drawing/2014/main" id="{4114C16E-31EF-4D47-A3B4-38361888866C}"/>
+              </a:ext>
+            </a:extLst>
+          </p:cNvPr>
+          <p:cNvSpPr/>
+          <p:nvPr/>
+        </p:nvSpPr>
+        <p:spPr>
+          <a:xfrm>
+            <a:off x="5092484" y="3649812"/>
+            <a:ext cx="213360" cy="167289"/>
+          </a:xfrm>
+          <a:prstGeom prst="ellipse">
+            <a:avLst/>
+          </a:prstGeom>
+          <a:solidFill>
+            <a:srgbClr val="00B050"/>
+          </a:solidFill>
+          <a:ln>
+            <a:solidFill>
+              <a:schemeClr val="bg1"/>
+            </a:solidFill>
+          </a:ln>
+        </p:spPr>
+        <p:style>
+          <a:lnRef idx="2">
+            <a:schemeClr val="accent1">
+              <a:shade val="50000"/>
+            </a:schemeClr>
+          </a:lnRef>
+          <a:fillRef idx="1">
+            <a:schemeClr val="accent1"/>
+          </a:fillRef>
+          <a:effectRef idx="0">
+            <a:schemeClr val="accent1"/>
+          </a:effectRef>
+          <a:fontRef idx="minor">
+            <a:schemeClr val="lt1"/>
+          </a:fontRef>
+        </p:style>
+        <p:txBody>
+          <a:bodyPr rtlCol="0" anchor="ctr"/>
+          <a:lstStyle/>
+          <a:p>
+            <a:pPr algn="ctr"/>
+            <a:endParaRPr lang="en-US"/>
+          </a:p>
+        </p:txBody>
+      </p:sp>
+      <p:sp>
+        <p:nvSpPr>
+          <p:cNvPr id="40" name="Oval 39">
+            <a:extLst>
+              <a:ext uri="{FF2B5EF4-FFF2-40B4-BE49-F238E27FC236}">
+                <a16:creationId xmlns:a16="http://schemas.microsoft.com/office/drawing/2014/main" id="{A52A7645-BF20-41B3-BF60-742ED5CD9084}"/>
+              </a:ext>
+            </a:extLst>
+          </p:cNvPr>
+          <p:cNvSpPr/>
+          <p:nvPr/>
+        </p:nvSpPr>
+        <p:spPr>
+          <a:xfrm>
+            <a:off x="3945536" y="3046089"/>
+            <a:ext cx="213360" cy="167289"/>
+          </a:xfrm>
+          <a:prstGeom prst="ellipse">
+            <a:avLst/>
+          </a:prstGeom>
+          <a:solidFill>
+            <a:srgbClr val="00B050"/>
+          </a:solidFill>
+          <a:ln>
+            <a:solidFill>
+              <a:schemeClr val="bg1"/>
+            </a:solidFill>
+          </a:ln>
+        </p:spPr>
+        <p:style>
+          <a:lnRef idx="2">
+            <a:schemeClr val="accent1">
+              <a:shade val="50000"/>
+            </a:schemeClr>
+          </a:lnRef>
+          <a:fillRef idx="1">
+            <a:schemeClr val="accent1"/>
+          </a:fillRef>
+          <a:effectRef idx="0">
+            <a:schemeClr val="accent1"/>
+          </a:effectRef>
+          <a:fontRef idx="minor">
+            <a:schemeClr val="lt1"/>
+          </a:fontRef>
+        </p:style>
+        <p:txBody>
+          <a:bodyPr rtlCol="0" anchor="ctr"/>
+          <a:lstStyle/>
+          <a:p>
+            <a:pPr algn="ctr"/>
+            <a:endParaRPr lang="en-US"/>
+          </a:p>
+        </p:txBody>
+      </p:sp>
+      <p:sp>
+        <p:nvSpPr>
+          <p:cNvPr id="41" name="Oval 40">
+            <a:extLst>
+              <a:ext uri="{FF2B5EF4-FFF2-40B4-BE49-F238E27FC236}">
+                <a16:creationId xmlns:a16="http://schemas.microsoft.com/office/drawing/2014/main" id="{BEBC1C31-7EA2-4A13-8DBC-DE50FCCA7B39}"/>
+              </a:ext>
+            </a:extLst>
+          </p:cNvPr>
+          <p:cNvSpPr/>
+          <p:nvPr/>
+        </p:nvSpPr>
+        <p:spPr>
+          <a:xfrm>
+            <a:off x="3075022" y="3673443"/>
+            <a:ext cx="213360" cy="167289"/>
+          </a:xfrm>
+          <a:prstGeom prst="ellipse">
+            <a:avLst/>
+          </a:prstGeom>
+          <a:solidFill>
+            <a:srgbClr val="00B050"/>
+          </a:solidFill>
+          <a:ln>
+            <a:solidFill>
+              <a:schemeClr val="bg1"/>
+            </a:solidFill>
+          </a:ln>
+        </p:spPr>
+        <p:style>
+          <a:lnRef idx="2">
+            <a:schemeClr val="accent1">
+              <a:shade val="50000"/>
+            </a:schemeClr>
+          </a:lnRef>
+          <a:fillRef idx="1">
+            <a:schemeClr val="accent1"/>
+          </a:fillRef>
+          <a:effectRef idx="0">
+            <a:schemeClr val="accent1"/>
+          </a:effectRef>
+          <a:fontRef idx="minor">
+            <a:schemeClr val="lt1"/>
+          </a:fontRef>
+        </p:style>
+        <p:txBody>
+          <a:bodyPr rtlCol="0" anchor="ctr"/>
+          <a:lstStyle/>
+          <a:p>
+            <a:pPr algn="ctr"/>
+            <a:endParaRPr lang="en-US"/>
+          </a:p>
+        </p:txBody>
+      </p:sp>
+      <p:sp>
+        <p:nvSpPr>
+          <p:cNvPr id="42" name="Oval 41">
+            <a:extLst>
+              <a:ext uri="{FF2B5EF4-FFF2-40B4-BE49-F238E27FC236}">
+                <a16:creationId xmlns:a16="http://schemas.microsoft.com/office/drawing/2014/main" id="{B87914A2-BC48-4977-BD49-87EA3CAC9222}"/>
+              </a:ext>
+            </a:extLst>
+          </p:cNvPr>
+          <p:cNvSpPr/>
+          <p:nvPr/>
+        </p:nvSpPr>
+        <p:spPr>
+          <a:xfrm>
+            <a:off x="2476462" y="4741650"/>
+            <a:ext cx="213360" cy="167289"/>
+          </a:xfrm>
+          <a:prstGeom prst="ellipse">
+            <a:avLst/>
+          </a:prstGeom>
+          <a:solidFill>
+            <a:srgbClr val="00B050"/>
+          </a:solidFill>
+          <a:ln>
+            <a:solidFill>
+              <a:schemeClr val="bg1"/>
+            </a:solidFill>
+          </a:ln>
+        </p:spPr>
+        <p:style>
+          <a:lnRef idx="2">
+            <a:schemeClr val="accent1">
+              <a:shade val="50000"/>
+            </a:schemeClr>
+          </a:lnRef>
+          <a:fillRef idx="1">
+            <a:schemeClr val="accent1"/>
+          </a:fillRef>
+          <a:effectRef idx="0">
+            <a:schemeClr val="accent1"/>
+          </a:effectRef>
+          <a:fontRef idx="minor">
+            <a:schemeClr val="lt1"/>
+          </a:fontRef>
+        </p:style>
+        <p:txBody>
+          <a:bodyPr rtlCol="0" anchor="ctr"/>
+          <a:lstStyle/>
+          <a:p>
+            <a:pPr algn="ctr"/>
+            <a:endParaRPr lang="en-US"/>
+          </a:p>
+        </p:txBody>
+      </p:sp>
+      <p:sp>
+        <p:nvSpPr>
+          <p:cNvPr id="43" name="Oval 42">
+            <a:extLst>
+              <a:ext uri="{FF2B5EF4-FFF2-40B4-BE49-F238E27FC236}">
+                <a16:creationId xmlns:a16="http://schemas.microsoft.com/office/drawing/2014/main" id="{0096995D-84A2-4934-9A5C-04DB7E82D4E0}"/>
+              </a:ext>
+            </a:extLst>
+          </p:cNvPr>
+          <p:cNvSpPr/>
+          <p:nvPr/>
+        </p:nvSpPr>
+        <p:spPr>
+          <a:xfrm>
+            <a:off x="2448242" y="2760591"/>
+            <a:ext cx="213360" cy="167289"/>
+          </a:xfrm>
+          <a:prstGeom prst="ellipse">
+            <a:avLst/>
+          </a:prstGeom>
+          <a:solidFill>
+            <a:srgbClr val="00B050"/>
+          </a:solidFill>
+          <a:ln>
+            <a:solidFill>
+              <a:schemeClr val="bg1"/>
+            </a:solidFill>
+          </a:ln>
+        </p:spPr>
+        <p:style>
+          <a:lnRef idx="2">
+            <a:schemeClr val="accent1">
+              <a:shade val="50000"/>
+            </a:schemeClr>
+          </a:lnRef>
+          <a:fillRef idx="1">
+            <a:schemeClr val="accent1"/>
+          </a:fillRef>
+          <a:effectRef idx="0">
+            <a:schemeClr val="accent1"/>
+          </a:effectRef>
+          <a:fontRef idx="minor">
+            <a:schemeClr val="lt1"/>
+          </a:fontRef>
+        </p:style>
+        <p:txBody>
+          <a:bodyPr rtlCol="0" anchor="ctr"/>
+          <a:lstStyle/>
+          <a:p>
+            <a:pPr algn="ctr"/>
+            <a:endParaRPr lang="en-US"/>
+          </a:p>
+        </p:txBody>
+      </p:sp>
+      <p:sp>
+        <p:nvSpPr>
+          <p:cNvPr id="44" name="Oval 43">
+            <a:extLst>
+              <a:ext uri="{FF2B5EF4-FFF2-40B4-BE49-F238E27FC236}">
+                <a16:creationId xmlns:a16="http://schemas.microsoft.com/office/drawing/2014/main" id="{754EA19E-B360-4BE3-802C-619307A16918}"/>
+              </a:ext>
+            </a:extLst>
+          </p:cNvPr>
+          <p:cNvSpPr/>
+          <p:nvPr/>
+        </p:nvSpPr>
+        <p:spPr>
+          <a:xfrm>
+            <a:off x="1286647" y="1706631"/>
+            <a:ext cx="213360" cy="167289"/>
+          </a:xfrm>
+          <a:prstGeom prst="ellipse">
+            <a:avLst/>
+          </a:prstGeom>
+          <a:solidFill>
+            <a:srgbClr val="00B050"/>
+          </a:solidFill>
+          <a:ln>
+            <a:solidFill>
+              <a:schemeClr val="bg1"/>
+            </a:solidFill>
+          </a:ln>
+        </p:spPr>
+        <p:style>
+          <a:lnRef idx="2">
+            <a:schemeClr val="accent1">
+              <a:shade val="50000"/>
+            </a:schemeClr>
+          </a:lnRef>
+          <a:fillRef idx="1">
+            <a:schemeClr val="accent1"/>
+          </a:fillRef>
+          <a:effectRef idx="0">
+            <a:schemeClr val="accent1"/>
+          </a:effectRef>
+          <a:fontRef idx="minor">
+            <a:schemeClr val="lt1"/>
+          </a:fontRef>
+        </p:style>
+        <p:txBody>
+          <a:bodyPr rtlCol="0" anchor="ctr"/>
+          <a:lstStyle/>
+          <a:p>
+            <a:pPr algn="ctr"/>
+            <a:endParaRPr lang="en-US"/>
+          </a:p>
+        </p:txBody>
+      </p:sp>
+    </p:spTree>
+    <p:extLst>
+      <p:ext uri="{BB962C8B-B14F-4D97-AF65-F5344CB8AC3E}">
+        <p14:creationId xmlns:p14="http://schemas.microsoft.com/office/powerpoint/2010/main" val="174044552"/>
+      </p:ext>
+    </p:extLst>
+  </p:cSld>
+  <p:clrMapOvr>
+    <a:masterClrMapping/>
+  </p:clrMapOvr>
+</p:sld>
+</file>
+
+<file path=ppt/slides/slide2.xml><?xml version="1.0" encoding="utf-8"?>
+<p:sld xmlns:a="http://schemas.openxmlformats.org/drawingml/2006/main" xmlns:r="http://schemas.openxmlformats.org/officeDocument/2006/relationships" xmlns:p="http://schemas.openxmlformats.org/presentationml/2006/main">
+  <p:cSld>
     <p:bg>
       <p:bgPr>
         <a:solidFill>
@@ -24723,7 +26300,7 @@
 </p:sld>
 </file>
 
-<file path=ppt/slides/slide2.xml><?xml version="1.0" encoding="utf-8"?>
+<file path=ppt/slides/slide3.xml><?xml version="1.0" encoding="utf-8"?>
 <p:sld xmlns:a="http://schemas.openxmlformats.org/drawingml/2006/main" xmlns:r="http://schemas.openxmlformats.org/officeDocument/2006/relationships" xmlns:p="http://schemas.openxmlformats.org/presentationml/2006/main">
   <p:cSld>
     <p:bg>
@@ -34590,116 +36167,6 @@
     <p:extLst>
       <p:ext uri="{BB962C8B-B14F-4D97-AF65-F5344CB8AC3E}">
         <p14:creationId xmlns:p14="http://schemas.microsoft.com/office/powerpoint/2010/main" val="2101769922"/>
-      </p:ext>
-    </p:extLst>
-  </p:cSld>
-  <p:clrMapOvr>
-    <a:masterClrMapping/>
-  </p:clrMapOvr>
-</p:sld>
-</file>
-
-<file path=ppt/slides/slide3.xml><?xml version="1.0" encoding="utf-8"?>
-<p:sld xmlns:a="http://schemas.openxmlformats.org/drawingml/2006/main" xmlns:r="http://schemas.openxmlformats.org/officeDocument/2006/relationships" xmlns:p="http://schemas.openxmlformats.org/presentationml/2006/main">
-  <p:cSld>
-    <p:spTree>
-      <p:nvGrpSpPr>
-        <p:cNvPr id="1" name=""/>
-        <p:cNvGrpSpPr/>
-        <p:nvPr/>
-      </p:nvGrpSpPr>
-      <p:grpSpPr>
-        <a:xfrm>
-          <a:off x="0" y="0"/>
-          <a:ext cx="0" cy="0"/>
-          <a:chOff x="0" y="0"/>
-          <a:chExt cx="0" cy="0"/>
-        </a:xfrm>
-      </p:grpSpPr>
-      <p:sp>
-        <p:nvSpPr>
-          <p:cNvPr id="2" name="Title 1">
-            <a:extLst>
-              <a:ext uri="{FF2B5EF4-FFF2-40B4-BE49-F238E27FC236}">
-                <a16:creationId xmlns:a16="http://schemas.microsoft.com/office/drawing/2014/main" id="{78FA792A-56E6-4B80-B623-9975EC3616C0}"/>
-              </a:ext>
-            </a:extLst>
-          </p:cNvPr>
-          <p:cNvSpPr>
-            <a:spLocks noGrp="1"/>
-          </p:cNvSpPr>
-          <p:nvPr>
-            <p:ph type="title"/>
-          </p:nvPr>
-        </p:nvSpPr>
-        <p:spPr/>
-        <p:txBody>
-          <a:bodyPr/>
-          <a:lstStyle/>
-          <a:p>
-            <a:endParaRPr lang="en-US"/>
-          </a:p>
-        </p:txBody>
-      </p:sp>
-      <p:sp>
-        <p:nvSpPr>
-          <p:cNvPr id="3" name="Content Placeholder 2">
-            <a:extLst>
-              <a:ext uri="{FF2B5EF4-FFF2-40B4-BE49-F238E27FC236}">
-                <a16:creationId xmlns:a16="http://schemas.microsoft.com/office/drawing/2014/main" id="{68E1205B-EF7A-4875-9421-15188EF7E701}"/>
-              </a:ext>
-            </a:extLst>
-          </p:cNvPr>
-          <p:cNvSpPr>
-            <a:spLocks noGrp="1"/>
-          </p:cNvSpPr>
-          <p:nvPr>
-            <p:ph idx="1"/>
-          </p:nvPr>
-        </p:nvSpPr>
-        <p:spPr/>
-        <p:txBody>
-          <a:bodyPr/>
-          <a:lstStyle/>
-          <a:p>
-            <a:endParaRPr lang="en-US"/>
-          </a:p>
-        </p:txBody>
-      </p:sp>
-      <p:pic>
-        <p:nvPicPr>
-          <p:cNvPr id="4" name="Picture 3">
-            <a:extLst>
-              <a:ext uri="{FF2B5EF4-FFF2-40B4-BE49-F238E27FC236}">
-                <a16:creationId xmlns:a16="http://schemas.microsoft.com/office/drawing/2014/main" id="{D21AC83D-B750-4C63-B254-43B65A2E1743}"/>
-              </a:ext>
-            </a:extLst>
-          </p:cNvPr>
-          <p:cNvPicPr>
-            <a:picLocks noChangeAspect="1"/>
-          </p:cNvPicPr>
-          <p:nvPr/>
-        </p:nvPicPr>
-        <p:blipFill>
-          <a:blip r:embed="rId2"/>
-          <a:stretch>
-            <a:fillRect/>
-          </a:stretch>
-        </p:blipFill>
-        <p:spPr>
-          <a:xfrm>
-            <a:off x="333220" y="199891"/>
-            <a:ext cx="6013759" cy="5213618"/>
-          </a:xfrm>
-          <a:prstGeom prst="rect">
-            <a:avLst/>
-          </a:prstGeom>
-        </p:spPr>
-      </p:pic>
-    </p:spTree>
-    <p:extLst>
-      <p:ext uri="{BB962C8B-B14F-4D97-AF65-F5344CB8AC3E}">
-        <p14:creationId xmlns:p14="http://schemas.microsoft.com/office/powerpoint/2010/main" val="174044552"/>
       </p:ext>
     </p:extLst>
   </p:cSld>
